--- a/assets/pptx/catalog-484.pptx
+++ b/assets/pptx/catalog-484.pptx
@@ -3287,7 +3287,7 @@
                 <a:ea typeface="Ebrima"/>
                 <a:cs typeface="Ebrima"/>
               </a:rPr>
-              <a:t>አምላክ አለ ሥሙም እግዚአብሔር ነው (2x)</a:t>
+              <a:t>አምላክ አለ ሥሙም እግዚአብሔር ነው 2x</a:t>
             </a:r>
           </a:p>
           <a:p>
@@ -3305,7 +3305,7 @@
                 <a:ea typeface="Ebrima"/>
                 <a:cs typeface="Ebrima"/>
               </a:rPr>
-              <a:t>ንጉሥ አለ ሥሙም እግዚአብሔር ነው (2x)</a:t>
+              <a:t>ንጉሥ አለ ሥሙም እግዚአብሔር ነው 2x</a:t>
             </a:r>
           </a:p>
         </p:txBody>
@@ -3390,7 +3390,7 @@
                 <a:ea typeface="Ebrima"/>
                 <a:cs typeface="Ebrima"/>
               </a:rPr>
-              <a:t>ሳይነዋወጥ እስካሁን ያለው (2x)</a:t>
+              <a:t>ሳይነዋወጥ እስካሁን ያለው 2x</a:t>
             </a:r>
           </a:p>
         </p:txBody>
@@ -3493,7 +3493,7 @@
                 <a:ea typeface="Ebrima"/>
                 <a:cs typeface="Ebrima"/>
               </a:rPr>
-              <a:t>አመልካለሁ አመልካለሁ (4x)</a:t>
+              <a:t>አመልካለሁ አመልካለሁ 4x</a:t>
             </a:r>
           </a:p>
         </p:txBody>
@@ -3596,7 +3596,7 @@
                 <a:ea typeface="Ebrima"/>
                 <a:cs typeface="Ebrima"/>
               </a:rPr>
-              <a:t>አመልካለሁ አመልካለሁ (4x)</a:t>
+              <a:t>አመልካለሁ አመልካለሁ 4x</a:t>
             </a:r>
           </a:p>
         </p:txBody>
@@ -3663,7 +3663,7 @@
                 <a:ea typeface="Ebrima"/>
                 <a:cs typeface="Ebrima"/>
               </a:rPr>
-              <a:t>አንድና ብቸኛ የሌለው ጓደኛ (2x)</a:t>
+              <a:t>አንድና ብቸኛ የሌለው ጓደኛ 2x</a:t>
             </a:r>
           </a:p>
           <a:p>
@@ -3699,7 +3699,7 @@
                 <a:ea typeface="Ebrima"/>
                 <a:cs typeface="Ebrima"/>
               </a:rPr>
-              <a:t>ከዘመናት መሃል እርሱ ብቻውን ነው (2x)</a:t>
+              <a:t>ከዘመናት መሃል እርሱ ብቻውን ነው 2x</a:t>
             </a:r>
           </a:p>
         </p:txBody>
@@ -3784,7 +3784,7 @@
                 <a:ea typeface="Ebrima"/>
                 <a:cs typeface="Ebrima"/>
               </a:rPr>
-              <a:t>ሳይነዋወጥ እስካሁን ያለው (2x)</a:t>
+              <a:t>ሳይነዋወጥ እስካሁን ያለው 2x</a:t>
             </a:r>
           </a:p>
         </p:txBody>
@@ -3851,7 +3851,7 @@
                 <a:ea typeface="Ebrima"/>
                 <a:cs typeface="Ebrima"/>
               </a:rPr>
-              <a:t>ሳይነዋወጥ እስካሁን ያለው (2x)</a:t>
+              <a:t>ሳይነዋወጥ እስካሁን ያለው 2x</a:t>
             </a:r>
           </a:p>
         </p:txBody>
@@ -3918,7 +3918,7 @@
                 <a:ea typeface="Ebrima"/>
                 <a:cs typeface="Ebrima"/>
               </a:rPr>
-              <a:t>አንድና ብቸኛ የሌለው ጓደኛ (2x)</a:t>
+              <a:t>አንድና ብቸኛ የሌለው ጓደኛ 2x</a:t>
             </a:r>
           </a:p>
           <a:p>
@@ -3954,7 +3954,7 @@
                 <a:ea typeface="Ebrima"/>
                 <a:cs typeface="Ebrima"/>
               </a:rPr>
-              <a:t>ከዘመናት መሃል እርሱ ብቻውን ነው (2x)</a:t>
+              <a:t>ከዘመናት መሃል እርሱ ብቻውን ነው 2x</a:t>
             </a:r>
           </a:p>
         </p:txBody>
@@ -4057,7 +4057,7 @@
                 <a:ea typeface="Ebrima"/>
                 <a:cs typeface="Ebrima"/>
               </a:rPr>
-              <a:t>ክብር ክብር ክብር (2x)</a:t>
+              <a:t>ክብር ክብር ክብር 2x</a:t>
             </a:r>
           </a:p>
           <a:p>
@@ -4075,7 +4075,7 @@
                 <a:ea typeface="Ebrima"/>
                 <a:cs typeface="Ebrima"/>
               </a:rPr>
-              <a:t>ሞገስ ሞገስ ሞገስ (2x)</a:t>
+              <a:t>ሞገስ ሞገስ ሞገስ 2x</a:t>
             </a:r>
           </a:p>
         </p:txBody>
@@ -4160,7 +4160,7 @@
                 <a:ea typeface="Ebrima"/>
                 <a:cs typeface="Ebrima"/>
               </a:rPr>
-              <a:t>እስካሁን ድረስ በክብር ያለው (2x)</a:t>
+              <a:t>እስካሁን ድረስ በክብር ያለው 2x</a:t>
             </a:r>
           </a:p>
         </p:txBody>
@@ -4245,7 +4245,7 @@
                 <a:ea typeface="Ebrima"/>
                 <a:cs typeface="Ebrima"/>
               </a:rPr>
-              <a:t>በሞገስ ያለው በሞገስ ያለው (2x)</a:t>
+              <a:t>በሞገስ ያለው በሞገስ ያለው 2x</a:t>
             </a:r>
           </a:p>
         </p:txBody>
